--- a/0019_studi_kasus3_materi_2_khanin_oktavia.pptx
+++ b/0019_studi_kasus3_materi_2_khanin_oktavia.pptx
@@ -9,6 +9,8 @@
     <p:sldId id="257" r:id="rId4"/>
     <p:sldId id="266" r:id="rId5"/>
     <p:sldId id="267" r:id="rId6"/>
+    <p:sldId id="268" r:id="rId15"/>
+    <p:sldId id="269" r:id="rId16"/>
     <p:sldId id="258" r:id="rId7"/>
   </p:sldIdLst>
   <p:sldSz cx="18288000" cy="10287000"/>
@@ -3881,7 +3883,7 @@
                 </a:solidFill>
                 <a:latin typeface="Inter"/>
               </a:rPr>
-              <a:t>Pembersihan Data &amp; Penskalaan</a:t>
+              <a:t>Pembersihan Data &amp; Audit Kualitas</a:t>
             </a:r>
           </a:p>
         </p:txBody>
@@ -3912,7 +3914,7 @@
               <a:spcAft>
                 <a:spcPts val="1200"/>
               </a:spcAft>
-              <a:defRPr sz="2600">
+              <a:defRPr sz="2800">
                 <a:solidFill>
                   <a:srgbClr val="403E3E"/>
                 </a:solidFill>
@@ -3920,7 +3922,7 @@
               </a:defRPr>
             </a:pPr>
             <a:r>
-              <a:t>Detail Kode: Kita membatasi data sebanyak 100,000 baris (nrows=100000) untuk efisiensi komputasi tanpa menghilangkan representasi data.</a:t>
+              <a:t>Data Ingestion: Memuat data mentah harga rumah dari dataset perumahan (total 21.613 records).</a:t>
             </a:r>
           </a:p>
           <a:p>
@@ -3928,7 +3930,7 @@
               <a:spcAft>
                 <a:spcPts val="1200"/>
               </a:spcAft>
-              <a:defRPr sz="2600">
+              <a:defRPr sz="2800">
                 <a:solidFill>
                   <a:srgbClr val="403E3E"/>
                 </a:solidFill>
@@ -3936,103 +3938,7 @@
               </a:defRPr>
             </a:pPr>
             <a:r>
-              <a:t>Logika Bisnis: Kita hanya memilih fitur-fitur yang paling berpengaruh terhadap harga rumah, yaitu:</a:t>
-            </a:r>
-          </a:p>
-          <a:p>
-            <a:pPr lvl="1">
-              <a:spcAft>
-                <a:spcPts val="1200"/>
-              </a:spcAft>
-              <a:defRPr sz="2200">
-                <a:solidFill>
-                  <a:srgbClr val="403E3E"/>
-                </a:solidFill>
-                <a:latin typeface="Inter"/>
-              </a:defRPr>
-            </a:pPr>
-            <a:r>
-              <a:t>- bedrooms &amp; bathrooms: Jumlah kamar tidur dan kamar mandi.</a:t>
-            </a:r>
-          </a:p>
-          <a:p>
-            <a:pPr lvl="1">
-              <a:spcAft>
-                <a:spcPts val="1200"/>
-              </a:spcAft>
-              <a:defRPr sz="2200">
-                <a:solidFill>
-                  <a:srgbClr val="403E3E"/>
-                </a:solidFill>
-                <a:latin typeface="Inter"/>
-              </a:defRPr>
-            </a:pPr>
-            <a:r>
-              <a:t>- sqft_living: Luas area hunian (korelasi linear tertinggi).</a:t>
-            </a:r>
-          </a:p>
-          <a:p>
-            <a:pPr lvl="1">
-              <a:spcAft>
-                <a:spcPts val="1200"/>
-              </a:spcAft>
-              <a:defRPr sz="2200">
-                <a:solidFill>
-                  <a:srgbClr val="403E3E"/>
-                </a:solidFill>
-                <a:latin typeface="Inter"/>
-              </a:defRPr>
-            </a:pPr>
-            <a:r>
-              <a:t>- grade: Kualitas konstruksi dan desain properti.</a:t>
-            </a:r>
-          </a:p>
-          <a:p>
-            <a:pPr lvl="1">
-              <a:spcAft>
-                <a:spcPts val="1200"/>
-              </a:spcAft>
-              <a:defRPr sz="2200">
-                <a:solidFill>
-                  <a:srgbClr val="403E3E"/>
-                </a:solidFill>
-                <a:latin typeface="Inter"/>
-              </a:defRPr>
-            </a:pPr>
-            <a:r>
-              <a:t>- House_Age: Usia rumah sejak dibangun/renovasi.</a:t>
-            </a:r>
-          </a:p>
-          <a:p>
-            <a:pPr lvl="1">
-              <a:spcAft>
-                <a:spcPts val="1200"/>
-              </a:spcAft>
-              <a:defRPr sz="2200">
-                <a:solidFill>
-                  <a:srgbClr val="403E3E"/>
-                </a:solidFill>
-                <a:latin typeface="Inter"/>
-              </a:defRPr>
-            </a:pPr>
-            <a:r>
-              <a:t>- Is_Renovated: Status renovasi properti.</a:t>
-            </a:r>
-          </a:p>
-          <a:p>
-            <a:pPr lvl="1">
-              <a:spcAft>
-                <a:spcPts val="1200"/>
-              </a:spcAft>
-              <a:defRPr sz="2200">
-                <a:solidFill>
-                  <a:srgbClr val="403E3E"/>
-                </a:solidFill>
-                <a:latin typeface="Inter"/>
-              </a:defRPr>
-            </a:pPr>
-            <a:r>
-              <a:t>- lat &amp; long: Lokasi geografis properti.</a:t>
+              <a:t>Pembersihan Awal: Memeriksa nilai kosong (missing values) dan baris duplikat.</a:t>
             </a:r>
           </a:p>
           <a:p>
@@ -4040,7 +3946,7 @@
               <a:spcAft>
                 <a:spcPts val="1200"/>
               </a:spcAft>
-              <a:defRPr sz="2600">
+              <a:defRPr sz="2800">
                 <a:solidFill>
                   <a:srgbClr val="403E3E"/>
                 </a:solidFill>
@@ -4048,7 +3954,23 @@
               </a:defRPr>
             </a:pPr>
             <a:r>
-              <a:t>Hasil: Kode berhasil memproses 21.613 baris data bersih siap latih.</a:t>
+              <a:t>Penggunaan Baris: Membatasi data menggunakan parameter nrows=100000 di pandas untuk menjaga efisiensi kinerja memori.</a:t>
+            </a:r>
+          </a:p>
+          <a:p>
+            <a:pPr>
+              <a:spcAft>
+                <a:spcPts val="1200"/>
+              </a:spcAft>
+              <a:defRPr sz="2800">
+                <a:solidFill>
+                  <a:srgbClr val="403E3E"/>
+                </a:solidFill>
+                <a:latin typeface="Inter"/>
+              </a:defRPr>
+            </a:pPr>
+            <a:r>
+              <a:t>Hasil Pembersihan: Diperoleh 21.613 baris data bersih siap pakai tanpa anomali nilai kosong.</a:t>
             </a:r>
           </a:p>
         </p:txBody>
@@ -4361,7 +4283,7 @@
                 </a:solidFill>
                 <a:latin typeface="Inter"/>
               </a:rPr>
-              <a:t>Analisis Korelasi &amp; Geografis</a:t>
+              <a:t>Seleksi Fitur &amp; Logika Bisnis</a:t>
             </a:r>
           </a:p>
         </p:txBody>
@@ -4400,15 +4322,15 @@
               </a:defRPr>
             </a:pPr>
             <a:r>
-              <a:t>Korelasi Fitur: Visualisasi heatmap korelasi menunjukkan bahwa sqft_living dan grade memiliki korelasi linear terkuat terhadap target price.</a:t>
-            </a:r>
-          </a:p>
-          <a:p>
-            <a:pPr>
+              <a:t>Memilih fitur fisik dan lokasi yang secara signifikan menentukan nilai jual properti:</a:t>
+            </a:r>
+          </a:p>
+          <a:p>
+            <a:pPr lvl="1">
               <a:spcAft>
                 <a:spcPts val="1200"/>
               </a:spcAft>
-              <a:defRPr sz="2800">
+              <a:defRPr sz="2400">
                 <a:solidFill>
                   <a:srgbClr val="403E3E"/>
                 </a:solidFill>
@@ -4416,15 +4338,15 @@
               </a:defRPr>
             </a:pPr>
             <a:r>
-              <a:t>Analisis Geografis: Plot spasial menggunakan koordinat lat dan long memperlihatkan persebaran properti.</a:t>
-            </a:r>
-          </a:p>
-          <a:p>
-            <a:pPr>
+              <a:t>- bedrooms &amp; bathrooms: Jumlah kamar tidur dan kamar mandi sebagai kapasitas fisik.</a:t>
+            </a:r>
+          </a:p>
+          <a:p>
+            <a:pPr lvl="1">
               <a:spcAft>
                 <a:spcPts val="1200"/>
               </a:spcAft>
-              <a:defRPr sz="2800">
+              <a:defRPr sz="2400">
                 <a:solidFill>
                   <a:srgbClr val="403E3E"/>
                 </a:solidFill>
@@ -4432,7 +4354,39 @@
               </a:defRPr>
             </a:pPr>
             <a:r>
-              <a:t>Logika Bisnis: Properti yang terletak di bagian utara (dekat pusat kota/akses premium) memiliki harga per sqft yang jauh lebih tinggi dibandingkan area selatan.</a:t>
+              <a:t>- sqft_living: Luas ruang tamu/luas bangunan dalam kaki persegi (korelasi terkuat).</a:t>
+            </a:r>
+          </a:p>
+          <a:p>
+            <a:pPr lvl="1">
+              <a:spcAft>
+                <a:spcPts val="1200"/>
+              </a:spcAft>
+              <a:defRPr sz="2400">
+                <a:solidFill>
+                  <a:srgbClr val="403E3E"/>
+                </a:solidFill>
+                <a:latin typeface="Inter"/>
+              </a:defRPr>
+            </a:pPr>
+            <a:r>
+              <a:t>- grade: Skor kualitas konstruksi dan desain dari 1 (terendah) hingga 13 (tertinggi).</a:t>
+            </a:r>
+          </a:p>
+          <a:p>
+            <a:pPr lvl="1">
+              <a:spcAft>
+                <a:spcPts val="1200"/>
+              </a:spcAft>
+              <a:defRPr sz="2400">
+                <a:solidFill>
+                  <a:srgbClr val="403E3E"/>
+                </a:solidFill>
+                <a:latin typeface="Inter"/>
+              </a:defRPr>
+            </a:pPr>
+            <a:r>
+              <a:t>- lat &amp; long: Letak koordinat lintang dan bujur untuk mewakili faktor lokasi geografis.</a:t>
             </a:r>
           </a:p>
         </p:txBody>
@@ -4745,7 +4699,7 @@
                 </a:solidFill>
                 <a:latin typeface="Inter"/>
               </a:rPr>
-              <a:t>Standarisasi &amp; Partisi</a:t>
+              <a:t>Rekayasa Fitur Properti</a:t>
             </a:r>
           </a:p>
         </p:txBody>
@@ -4784,7 +4738,39 @@
               </a:defRPr>
             </a:pPr>
             <a:r>
-              <a:t>Pembagian Data: Data dipecah menjadi 80% Training Set dan 20% Testing Set secara acak.</a:t>
+              <a:t>Menghitung variabel baru berdasarkan waktu pembangunan:</a:t>
+            </a:r>
+          </a:p>
+          <a:p>
+            <a:pPr lvl="1">
+              <a:spcAft>
+                <a:spcPts val="1200"/>
+              </a:spcAft>
+              <a:defRPr sz="2400">
+                <a:solidFill>
+                  <a:srgbClr val="403E3E"/>
+                </a:solidFill>
+                <a:latin typeface="Inter"/>
+              </a:defRPr>
+            </a:pPr>
+            <a:r>
+              <a:t>- House_Age: Usia bangunan sejak dibangun hingga tahun transaksi.</a:t>
+            </a:r>
+          </a:p>
+          <a:p>
+            <a:pPr lvl="1">
+              <a:spcAft>
+                <a:spcPts val="1200"/>
+              </a:spcAft>
+              <a:defRPr sz="2400">
+                <a:solidFill>
+                  <a:srgbClr val="403E3E"/>
+                </a:solidFill>
+                <a:latin typeface="Inter"/>
+              </a:defRPr>
+            </a:pPr>
+            <a:r>
+              <a:t>- Is_Renovated: Variabel biner (0 atau 1) yang menunjukkan apakah bangunan pernah direnovasi.</a:t>
             </a:r>
           </a:p>
           <a:p>
@@ -4800,23 +4786,7 @@
               </a:defRPr>
             </a:pPr>
             <a:r>
-              <a:t>Feature Scaling: Menggunakan StandardScaler untuk menormalisasi seluruh fitur numerik kontinu sebelum dilatih oleh SVR.</a:t>
-            </a:r>
-          </a:p>
-          <a:p>
-            <a:pPr>
-              <a:spcAft>
-                <a:spcPts val="1200"/>
-              </a:spcAft>
-              <a:defRPr sz="2800">
-                <a:solidFill>
-                  <a:srgbClr val="403E3E"/>
-                </a:solidFill>
-                <a:latin typeface="Inter"/>
-              </a:defRPr>
-            </a:pPr>
-            <a:r>
-              <a:t>Tujuan: Menjamin fitur berskala besar (seperti sqft_living) tidak mendominasi perhitungan margin pada algoritma SVR.</a:t>
+              <a:t>Logika Bisnis: Menangkap depresiasi nilai bangunan akibat penuaan fisik, sekaligus mengapresiasi peningkatan harga pasca-renovasi.</a:t>
             </a:r>
           </a:p>
         </p:txBody>
@@ -4830,6 +4800,744 @@
 </file>
 
 <file path=ppt/slides/slide5.xml><?xml version="1.0" encoding="utf-8"?>
+<p:sld xmlns:a="http://schemas.openxmlformats.org/drawingml/2006/main" xmlns:p="http://schemas.openxmlformats.org/presentationml/2006/main" xmlns:r="http://schemas.openxmlformats.org/officeDocument/2006/relationships">
+  <p:cSld>
+    <p:spTree>
+      <p:nvGrpSpPr>
+        <p:cNvPr id="1" name=""/>
+        <p:cNvGrpSpPr/>
+        <p:nvPr/>
+      </p:nvGrpSpPr>
+      <p:grpSpPr/>
+      <p:grpSp>
+        <p:nvGrpSpPr>
+          <p:cNvPr id="2" name="Group 2"/>
+          <p:cNvGrpSpPr/>
+          <p:nvPr/>
+        </p:nvGrpSpPr>
+        <p:grpSpPr>
+          <a:xfrm rot="5400000">
+            <a:off x="12432431" y="4605338"/>
+            <a:ext cx="10730064" cy="1076325"/>
+            <a:chOff x="0" y="0"/>
+            <a:chExt cx="3845413" cy="385731"/>
+          </a:xfrm>
+        </p:grpSpPr>
+        <p:sp>
+          <p:nvSpPr>
+            <p:cNvPr id="3" name="Freeform 3"/>
+            <p:cNvSpPr/>
+            <p:nvPr/>
+          </p:nvSpPr>
+          <p:spPr>
+            <a:xfrm>
+              <a:off x="0" y="0"/>
+              <a:ext cx="3845413" cy="385731"/>
+            </a:xfrm>
+            <a:custGeom>
+              <a:avLst/>
+              <a:gdLst/>
+              <a:ahLst/>
+              <a:cxnLst/>
+              <a:rect l="l" t="t" r="r" b="b"/>
+              <a:pathLst>
+                <a:path w="3845413" h="385731">
+                  <a:moveTo>
+                    <a:pt x="0" y="0"/>
+                  </a:moveTo>
+                  <a:lnTo>
+                    <a:pt x="3845413" y="0"/>
+                  </a:lnTo>
+                  <a:lnTo>
+                    <a:pt x="3845413" y="385731"/>
+                  </a:lnTo>
+                  <a:lnTo>
+                    <a:pt x="0" y="385731"/>
+                  </a:lnTo>
+                  <a:close/>
+                </a:path>
+              </a:pathLst>
+            </a:custGeom>
+            <a:solidFill>
+              <a:srgbClr val="FDFDFA"/>
+            </a:solidFill>
+            <a:ln w="9525" cap="sq">
+              <a:solidFill>
+                <a:srgbClr val="403E3E"/>
+              </a:solidFill>
+              <a:prstDash val="solid"/>
+              <a:miter/>
+            </a:ln>
+          </p:spPr>
+        </p:sp>
+        <p:sp>
+          <p:nvSpPr>
+            <p:cNvPr id="4" name="TextBox 4"/>
+            <p:cNvSpPr txBox="1"/>
+            <p:nvPr/>
+          </p:nvSpPr>
+          <p:spPr>
+            <a:xfrm>
+              <a:off x="0" y="-47625"/>
+              <a:ext cx="3845413" cy="433356"/>
+            </a:xfrm>
+            <a:prstGeom prst="rect">
+              <a:avLst/>
+            </a:prstGeom>
+          </p:spPr>
+          <p:txBody>
+            <a:bodyPr lIns="50800" tIns="50800" rIns="50800" bIns="50800" rtlCol="0" anchor="ctr"/>
+            <a:lstStyle/>
+            <a:p>
+              <a:pPr algn="ctr">
+                <a:lnSpc>
+                  <a:spcPts val="1960"/>
+                </a:lnSpc>
+              </a:pPr>
+            </a:p>
+          </p:txBody>
+        </p:sp>
+      </p:grpSp>
+      <p:sp>
+        <p:nvSpPr>
+          <p:cNvPr id="9" name="TextBox 9"/>
+          <p:cNvSpPr txBox="1"/>
+          <p:nvPr/>
+        </p:nvSpPr>
+        <p:spPr>
+          <a:xfrm>
+            <a:off x="15506330" y="8951595"/>
+            <a:ext cx="152400" cy="190500"/>
+          </a:xfrm>
+          <a:prstGeom prst="rect">
+            <a:avLst/>
+          </a:prstGeom>
+        </p:spPr>
+        <p:txBody>
+          <a:bodyPr wrap="none" lIns="0" tIns="0" rIns="0" bIns="0" rtlCol="0" anchor="t">
+            <a:spAutoFit/>
+          </a:bodyPr>
+          <a:lstStyle/>
+          <a:p>
+            <a:r>
+              <a:rPr sz="1800">
+                <a:solidFill>
+                  <a:srgbClr val="403E3E"/>
+                </a:solidFill>
+                <a:latin typeface="Inter"/>
+              </a:rPr>
+              <a:t>PAGE 5</a:t>
+            </a:r>
+          </a:p>
+        </p:txBody>
+      </p:sp>
+      <p:grpSp>
+        <p:nvGrpSpPr>
+          <p:cNvPr id="15" name="Group 15"/>
+          <p:cNvGrpSpPr/>
+          <p:nvPr/>
+        </p:nvGrpSpPr>
+        <p:grpSpPr>
+          <a:xfrm rot="5400000">
+            <a:off x="-3195310" y="2727751"/>
+            <a:ext cx="10730064" cy="4831498"/>
+            <a:chOff x="0" y="0"/>
+            <a:chExt cx="3845413" cy="1731500"/>
+          </a:xfrm>
+        </p:grpSpPr>
+        <p:sp>
+          <p:nvSpPr>
+            <p:cNvPr id="16" name="Freeform 16"/>
+            <p:cNvSpPr/>
+            <p:nvPr/>
+          </p:nvSpPr>
+          <p:spPr>
+            <a:xfrm>
+              <a:off x="0" y="0"/>
+              <a:ext cx="3845413" cy="1731500"/>
+            </a:xfrm>
+            <a:custGeom>
+              <a:avLst/>
+              <a:gdLst/>
+              <a:ahLst/>
+              <a:cxnLst/>
+              <a:rect l="l" t="t" r="r" b="b"/>
+              <a:pathLst>
+                <a:path w="3845413" h="1731500">
+                  <a:moveTo>
+                    <a:pt x="0" y="0"/>
+                  </a:moveTo>
+                  <a:lnTo>
+                    <a:pt x="3845413" y="0"/>
+                  </a:lnTo>
+                  <a:lnTo>
+                    <a:pt x="3845413" y="1731500"/>
+                  </a:lnTo>
+                  <a:lnTo>
+                    <a:pt x="0" y="1731500"/>
+                  </a:lnTo>
+                  <a:close/>
+                </a:path>
+              </a:pathLst>
+            </a:custGeom>
+            <a:solidFill>
+              <a:srgbClr val="F6F5F3"/>
+            </a:solidFill>
+            <a:ln w="9525" cap="sq">
+              <a:solidFill>
+                <a:srgbClr val="403E3E"/>
+              </a:solidFill>
+              <a:prstDash val="solid"/>
+              <a:miter/>
+            </a:ln>
+          </p:spPr>
+        </p:sp>
+        <p:sp>
+          <p:nvSpPr>
+            <p:cNvPr id="17" name="TextBox 17"/>
+            <p:cNvSpPr txBox="1"/>
+            <p:nvPr/>
+          </p:nvSpPr>
+          <p:spPr>
+            <a:xfrm>
+              <a:off x="0" y="-47625"/>
+              <a:ext cx="3845413" cy="1779125"/>
+            </a:xfrm>
+            <a:prstGeom prst="rect">
+              <a:avLst/>
+            </a:prstGeom>
+          </p:spPr>
+          <p:txBody>
+            <a:bodyPr lIns="50800" tIns="50800" rIns="50800" bIns="50800" rtlCol="0" anchor="ctr"/>
+            <a:lstStyle/>
+            <a:p>
+              <a:pPr algn="ctr">
+                <a:lnSpc>
+                  <a:spcPts val="1960"/>
+                </a:lnSpc>
+              </a:pPr>
+            </a:p>
+          </p:txBody>
+        </p:sp>
+      </p:grpSp>
+      <p:sp>
+        <p:nvSpPr>
+          <p:cNvPr id="18" name="TextBox 17"/>
+          <p:cNvSpPr txBox="1"/>
+          <p:nvPr/>
+        </p:nvSpPr>
+        <p:spPr>
+          <a:xfrm>
+            <a:off x="90525" y="1028700"/>
+            <a:ext cx="8769096" cy="1354226"/>
+          </a:xfrm>
+          <a:prstGeom prst="rect">
+            <a:avLst/>
+          </a:prstGeom>
+          <a:noFill/>
+        </p:spPr>
+        <p:txBody>
+          <a:bodyPr wrap="square">
+            <a:spAutoFit/>
+          </a:bodyPr>
+          <a:lstStyle/>
+          <a:p>
+            <a:r>
+              <a:rPr sz="4400" b="0" i="0">
+                <a:solidFill>
+                  <a:srgbClr val="403E3E"/>
+                </a:solidFill>
+                <a:latin typeface="Inter"/>
+              </a:rPr>
+              <a:t>Tahap Data
+   Engineering</a:t>
+            </a:r>
+          </a:p>
+        </p:txBody>
+      </p:sp>
+      <p:sp>
+        <p:nvSpPr>
+          <p:cNvPr id="19" name="TextBox 18"/>
+          <p:cNvSpPr txBox="1"/>
+          <p:nvPr/>
+        </p:nvSpPr>
+        <p:spPr>
+          <a:xfrm>
+            <a:off x="457200" y="3161995"/>
+            <a:ext cx="3994099" cy="2708452"/>
+          </a:xfrm>
+          <a:prstGeom prst="rect">
+            <a:avLst/>
+          </a:prstGeom>
+          <a:noFill/>
+        </p:spPr>
+        <p:txBody>
+          <a:bodyPr wrap="square">
+            <a:spAutoFit/>
+          </a:bodyPr>
+          <a:lstStyle/>
+          <a:p>
+            <a:r>
+              <a:rPr sz="4400" b="0" i="0">
+                <a:solidFill>
+                  <a:srgbClr val="403E3E"/>
+                </a:solidFill>
+                <a:latin typeface="Inter"/>
+              </a:rPr>
+              <a:t>Analisis Spasial &amp; Geografis</a:t>
+            </a:r>
+          </a:p>
+        </p:txBody>
+      </p:sp>
+      <p:sp>
+        <p:nvSpPr>
+          <p:cNvPr id="20" name="TextBox 19"/>
+          <p:cNvSpPr txBox="1"/>
+          <p:nvPr/>
+        </p:nvSpPr>
+        <p:spPr>
+          <a:xfrm>
+            <a:off x="5410504" y="1028700"/>
+            <a:ext cx="12401092" cy="7755940"/>
+          </a:xfrm>
+          <a:prstGeom prst="rect">
+            <a:avLst/>
+          </a:prstGeom>
+          <a:noFill/>
+        </p:spPr>
+        <p:txBody>
+          <a:bodyPr wrap="square">
+            <a:spAutoFit/>
+          </a:bodyPr>
+          <a:lstStyle/>
+          <a:p>
+            <a:pPr>
+              <a:spcAft>
+                <a:spcPts val="1200"/>
+              </a:spcAft>
+              <a:defRPr sz="2800">
+                <a:solidFill>
+                  <a:srgbClr val="403E3E"/>
+                </a:solidFill>
+                <a:latin typeface="Inter"/>
+              </a:defRPr>
+            </a:pPr>
+            <a:r>
+              <a:t>Menganalisis korelasi antara koordinat lintang (lat) dengan harga jual properti.</a:t>
+            </a:r>
+          </a:p>
+          <a:p>
+            <a:pPr>
+              <a:spcAft>
+                <a:spcPts val="1200"/>
+              </a:spcAft>
+              <a:defRPr sz="2800">
+                <a:solidFill>
+                  <a:srgbClr val="403E3E"/>
+                </a:solidFill>
+                <a:latin typeface="Inter"/>
+              </a:defRPr>
+            </a:pPr>
+            <a:r>
+              <a:t>Visualisasi Spasial: Menunjukkan daerah bagian utara (dekat pusat kota/pantai premium) memiliki harga per kaki persegi yang jauh lebih mahal.</a:t>
+            </a:r>
+          </a:p>
+          <a:p>
+            <a:pPr>
+              <a:spcAft>
+                <a:spcPts val="1200"/>
+              </a:spcAft>
+              <a:defRPr sz="2800">
+                <a:solidFill>
+                  <a:srgbClr val="403E3E"/>
+                </a:solidFill>
+                <a:latin typeface="Inter"/>
+              </a:defRPr>
+            </a:pPr>
+            <a:r>
+              <a:t>Kesimpulan: Faktor lokasi geografis (lat, long) terbukti menjadi prediktor yang sangat kuat di samping ukuran fisik rumah.</a:t>
+            </a:r>
+          </a:p>
+        </p:txBody>
+      </p:sp>
+    </p:spTree>
+  </p:cSld>
+  <p:clrMapOvr>
+    <a:masterClrMapping/>
+  </p:clrMapOvr>
+</p:sld>
+</file>
+
+<file path=ppt/slides/slide6.xml><?xml version="1.0" encoding="utf-8"?>
+<p:sld xmlns:a="http://schemas.openxmlformats.org/drawingml/2006/main" xmlns:p="http://schemas.openxmlformats.org/presentationml/2006/main" xmlns:r="http://schemas.openxmlformats.org/officeDocument/2006/relationships">
+  <p:cSld>
+    <p:spTree>
+      <p:nvGrpSpPr>
+        <p:cNvPr id="1" name=""/>
+        <p:cNvGrpSpPr/>
+        <p:nvPr/>
+      </p:nvGrpSpPr>
+      <p:grpSpPr/>
+      <p:grpSp>
+        <p:nvGrpSpPr>
+          <p:cNvPr id="2" name="Group 2"/>
+          <p:cNvGrpSpPr/>
+          <p:nvPr/>
+        </p:nvGrpSpPr>
+        <p:grpSpPr>
+          <a:xfrm rot="5400000">
+            <a:off x="12432431" y="4605338"/>
+            <a:ext cx="10730064" cy="1076325"/>
+            <a:chOff x="0" y="0"/>
+            <a:chExt cx="3845413" cy="385731"/>
+          </a:xfrm>
+        </p:grpSpPr>
+        <p:sp>
+          <p:nvSpPr>
+            <p:cNvPr id="3" name="Freeform 3"/>
+            <p:cNvSpPr/>
+            <p:nvPr/>
+          </p:nvSpPr>
+          <p:spPr>
+            <a:xfrm>
+              <a:off x="0" y="0"/>
+              <a:ext cx="3845413" cy="385731"/>
+            </a:xfrm>
+            <a:custGeom>
+              <a:avLst/>
+              <a:gdLst/>
+              <a:ahLst/>
+              <a:cxnLst/>
+              <a:rect l="l" t="t" r="r" b="b"/>
+              <a:pathLst>
+                <a:path w="3845413" h="385731">
+                  <a:moveTo>
+                    <a:pt x="0" y="0"/>
+                  </a:moveTo>
+                  <a:lnTo>
+                    <a:pt x="3845413" y="0"/>
+                  </a:lnTo>
+                  <a:lnTo>
+                    <a:pt x="3845413" y="385731"/>
+                  </a:lnTo>
+                  <a:lnTo>
+                    <a:pt x="0" y="385731"/>
+                  </a:lnTo>
+                  <a:close/>
+                </a:path>
+              </a:pathLst>
+            </a:custGeom>
+            <a:solidFill>
+              <a:srgbClr val="FDFDFA"/>
+            </a:solidFill>
+            <a:ln w="9525" cap="sq">
+              <a:solidFill>
+                <a:srgbClr val="403E3E"/>
+              </a:solidFill>
+              <a:prstDash val="solid"/>
+              <a:miter/>
+            </a:ln>
+          </p:spPr>
+        </p:sp>
+        <p:sp>
+          <p:nvSpPr>
+            <p:cNvPr id="4" name="TextBox 4"/>
+            <p:cNvSpPr txBox="1"/>
+            <p:nvPr/>
+          </p:nvSpPr>
+          <p:spPr>
+            <a:xfrm>
+              <a:off x="0" y="-47625"/>
+              <a:ext cx="3845413" cy="433356"/>
+            </a:xfrm>
+            <a:prstGeom prst="rect">
+              <a:avLst/>
+            </a:prstGeom>
+          </p:spPr>
+          <p:txBody>
+            <a:bodyPr lIns="50800" tIns="50800" rIns="50800" bIns="50800" rtlCol="0" anchor="ctr"/>
+            <a:lstStyle/>
+            <a:p>
+              <a:pPr algn="ctr">
+                <a:lnSpc>
+                  <a:spcPts val="1960"/>
+                </a:lnSpc>
+              </a:pPr>
+            </a:p>
+          </p:txBody>
+        </p:sp>
+      </p:grpSp>
+      <p:sp>
+        <p:nvSpPr>
+          <p:cNvPr id="9" name="TextBox 9"/>
+          <p:cNvSpPr txBox="1"/>
+          <p:nvPr/>
+        </p:nvSpPr>
+        <p:spPr>
+          <a:xfrm>
+            <a:off x="15506330" y="8951595"/>
+            <a:ext cx="152400" cy="190500"/>
+          </a:xfrm>
+          <a:prstGeom prst="rect">
+            <a:avLst/>
+          </a:prstGeom>
+        </p:spPr>
+        <p:txBody>
+          <a:bodyPr wrap="none" lIns="0" tIns="0" rIns="0" bIns="0" rtlCol="0" anchor="t">
+            <a:spAutoFit/>
+          </a:bodyPr>
+          <a:lstStyle/>
+          <a:p>
+            <a:r>
+              <a:rPr sz="1800">
+                <a:solidFill>
+                  <a:srgbClr val="403E3E"/>
+                </a:solidFill>
+                <a:latin typeface="Inter"/>
+              </a:rPr>
+              <a:t>PAGE 6</a:t>
+            </a:r>
+          </a:p>
+        </p:txBody>
+      </p:sp>
+      <p:grpSp>
+        <p:nvGrpSpPr>
+          <p:cNvPr id="15" name="Group 15"/>
+          <p:cNvGrpSpPr/>
+          <p:nvPr/>
+        </p:nvGrpSpPr>
+        <p:grpSpPr>
+          <a:xfrm rot="5400000">
+            <a:off x="-3195310" y="2727751"/>
+            <a:ext cx="10730064" cy="4831498"/>
+            <a:chOff x="0" y="0"/>
+            <a:chExt cx="3845413" cy="1731500"/>
+          </a:xfrm>
+        </p:grpSpPr>
+        <p:sp>
+          <p:nvSpPr>
+            <p:cNvPr id="16" name="Freeform 16"/>
+            <p:cNvSpPr/>
+            <p:nvPr/>
+          </p:nvSpPr>
+          <p:spPr>
+            <a:xfrm>
+              <a:off x="0" y="0"/>
+              <a:ext cx="3845413" cy="1731500"/>
+            </a:xfrm>
+            <a:custGeom>
+              <a:avLst/>
+              <a:gdLst/>
+              <a:ahLst/>
+              <a:cxnLst/>
+              <a:rect l="l" t="t" r="r" b="b"/>
+              <a:pathLst>
+                <a:path w="3845413" h="1731500">
+                  <a:moveTo>
+                    <a:pt x="0" y="0"/>
+                  </a:moveTo>
+                  <a:lnTo>
+                    <a:pt x="3845413" y="0"/>
+                  </a:lnTo>
+                  <a:lnTo>
+                    <a:pt x="3845413" y="1731500"/>
+                  </a:lnTo>
+                  <a:lnTo>
+                    <a:pt x="0" y="1731500"/>
+                  </a:lnTo>
+                  <a:close/>
+                </a:path>
+              </a:pathLst>
+            </a:custGeom>
+            <a:solidFill>
+              <a:srgbClr val="F6F5F3"/>
+            </a:solidFill>
+            <a:ln w="9525" cap="sq">
+              <a:solidFill>
+                <a:srgbClr val="403E3E"/>
+              </a:solidFill>
+              <a:prstDash val="solid"/>
+              <a:miter/>
+            </a:ln>
+          </p:spPr>
+        </p:sp>
+        <p:sp>
+          <p:nvSpPr>
+            <p:cNvPr id="17" name="TextBox 17"/>
+            <p:cNvSpPr txBox="1"/>
+            <p:nvPr/>
+          </p:nvSpPr>
+          <p:spPr>
+            <a:xfrm>
+              <a:off x="0" y="-47625"/>
+              <a:ext cx="3845413" cy="1779125"/>
+            </a:xfrm>
+            <a:prstGeom prst="rect">
+              <a:avLst/>
+            </a:prstGeom>
+          </p:spPr>
+          <p:txBody>
+            <a:bodyPr lIns="50800" tIns="50800" rIns="50800" bIns="50800" rtlCol="0" anchor="ctr"/>
+            <a:lstStyle/>
+            <a:p>
+              <a:pPr algn="ctr">
+                <a:lnSpc>
+                  <a:spcPts val="1960"/>
+                </a:lnSpc>
+              </a:pPr>
+            </a:p>
+          </p:txBody>
+        </p:sp>
+      </p:grpSp>
+      <p:sp>
+        <p:nvSpPr>
+          <p:cNvPr id="18" name="TextBox 17"/>
+          <p:cNvSpPr txBox="1"/>
+          <p:nvPr/>
+        </p:nvSpPr>
+        <p:spPr>
+          <a:xfrm>
+            <a:off x="90525" y="1028700"/>
+            <a:ext cx="8769096" cy="1354226"/>
+          </a:xfrm>
+          <a:prstGeom prst="rect">
+            <a:avLst/>
+          </a:prstGeom>
+          <a:noFill/>
+        </p:spPr>
+        <p:txBody>
+          <a:bodyPr wrap="square">
+            <a:spAutoFit/>
+          </a:bodyPr>
+          <a:lstStyle/>
+          <a:p>
+            <a:r>
+              <a:rPr sz="4400" b="0" i="0">
+                <a:solidFill>
+                  <a:srgbClr val="403E3E"/>
+                </a:solidFill>
+                <a:latin typeface="Inter"/>
+              </a:rPr>
+              <a:t>Tahap Data
+   Engineering</a:t>
+            </a:r>
+          </a:p>
+        </p:txBody>
+      </p:sp>
+      <p:sp>
+        <p:nvSpPr>
+          <p:cNvPr id="19" name="TextBox 18"/>
+          <p:cNvSpPr txBox="1"/>
+          <p:nvPr/>
+        </p:nvSpPr>
+        <p:spPr>
+          <a:xfrm>
+            <a:off x="457200" y="3161995"/>
+            <a:ext cx="3994099" cy="2708452"/>
+          </a:xfrm>
+          <a:prstGeom prst="rect">
+            <a:avLst/>
+          </a:prstGeom>
+          <a:noFill/>
+        </p:spPr>
+        <p:txBody>
+          <a:bodyPr wrap="square">
+            <a:spAutoFit/>
+          </a:bodyPr>
+          <a:lstStyle/>
+          <a:p>
+            <a:r>
+              <a:rPr sz="4400" b="0" i="0">
+                <a:solidFill>
+                  <a:srgbClr val="403E3E"/>
+                </a:solidFill>
+                <a:latin typeface="Inter"/>
+              </a:rPr>
+              <a:t>Standarisasi Data &amp; Partisi</a:t>
+            </a:r>
+          </a:p>
+        </p:txBody>
+      </p:sp>
+      <p:sp>
+        <p:nvSpPr>
+          <p:cNvPr id="20" name="TextBox 19"/>
+          <p:cNvSpPr txBox="1"/>
+          <p:nvPr/>
+        </p:nvSpPr>
+        <p:spPr>
+          <a:xfrm>
+            <a:off x="5410504" y="1028700"/>
+            <a:ext cx="12401092" cy="7755940"/>
+          </a:xfrm>
+          <a:prstGeom prst="rect">
+            <a:avLst/>
+          </a:prstGeom>
+          <a:noFill/>
+        </p:spPr>
+        <p:txBody>
+          <a:bodyPr wrap="square">
+            <a:spAutoFit/>
+          </a:bodyPr>
+          <a:lstStyle/>
+          <a:p>
+            <a:pPr>
+              <a:spcAft>
+                <a:spcPts val="1200"/>
+              </a:spcAft>
+              <a:defRPr sz="2800">
+                <a:solidFill>
+                  <a:srgbClr val="403E3E"/>
+                </a:solidFill>
+                <a:latin typeface="Inter"/>
+              </a:defRPr>
+            </a:pPr>
+            <a:r>
+              <a:t>Pembagian Dataset: Membagi data menjadi 80% Training Set untuk melatih model dan 20% Testing Set untuk menguji model.</a:t>
+            </a:r>
+          </a:p>
+          <a:p>
+            <a:pPr>
+              <a:spcAft>
+                <a:spcPts val="1200"/>
+              </a:spcAft>
+              <a:defRPr sz="2800">
+                <a:solidFill>
+                  <a:srgbClr val="403E3E"/>
+                </a:solidFill>
+                <a:latin typeface="Inter"/>
+              </a:defRPr>
+            </a:pPr>
+            <a:r>
+              <a:t>Penskalaan Fitur: Menerapkan StandardScaler dari sklearn untuk meratakan skala fitur kontinu seperti sqft_living dan annual_inc.</a:t>
+            </a:r>
+          </a:p>
+          <a:p>
+            <a:pPr>
+              <a:spcAft>
+                <a:spcPts val="1200"/>
+              </a:spcAft>
+              <a:defRPr sz="2800">
+                <a:solidFill>
+                  <a:srgbClr val="403E3E"/>
+                </a:solidFill>
+                <a:latin typeface="Inter"/>
+              </a:defRPr>
+            </a:pPr>
+            <a:r>
+              <a:t>Justifikasi: Mencegah fitur berskala besar mendominasi fungsi penalti margin pada algoritma Support Vector Regression (SVR).</a:t>
+            </a:r>
+          </a:p>
+        </p:txBody>
+      </p:sp>
+    </p:spTree>
+  </p:cSld>
+  <p:clrMapOvr>
+    <a:masterClrMapping/>
+  </p:clrMapOvr>
+</p:sld>
+</file>
+
+<file path=ppt/slides/slide7.xml><?xml version="1.0" encoding="utf-8"?>
 <p:sld xmlns:a="http://schemas.openxmlformats.org/drawingml/2006/main" xmlns:r="http://schemas.openxmlformats.org/officeDocument/2006/relationships" xmlns:p="http://schemas.openxmlformats.org/presentationml/2006/main">
   <p:cSld>
     <p:bg>
